--- a/CyberShield_AI_Presentation.pptx
+++ b/CyberShield_AI_Presentation.pptx
@@ -3142,7 +3142,7 @@
           <a:p/>
           <a:p>
             <a:r>
-              <a:t>Presented by: M. Gopi Chandu</a:t>
+              <a:t>Presented by: M. Gopi</a:t>
             </a:r>
           </a:p>
           <a:p>
